--- a/stats_case_study/case_studies/24_bayes_fraud_alert/presentation/case_study_presentation.pptx
+++ b/stats_case_study/case_studies/24_bayes_fraud_alert/presentation/case_study_presentation.pptx
@@ -7524,7 +7524,7 @@
                 </a:solidFill>
                 <a:latin typeface="Calibri"/>
               </a:rPr>
-              <a:t> on this one set of 14 groups it did not beat the raw rates (squared error 5.6 vs 3.1, ×10⁻⁶). Over 3,000 simulated sets it won 71% of the time.</a:t>
+              <a:t> on this one set of 14 groups it did not beat the raw rates (squared error 5.6 for shrinkage vs 3.1 for raw rates, ×10⁻⁶). Over 3,000 simulated sets it won 71% of the time.</a:t>
             </a:r>
           </a:p>
         </p:txBody>
